--- a/pokemon-card-yakusoku-poster.pptx
+++ b/pokemon-card-yakusoku-poster.pptx
@@ -988,12 +988,12 @@
         </p:nvSpPr>
         <p:spPr>
           <a:xfrm>
-            <a:off x="320040" y="1719072"/>
-            <a:ext cx="6922008" cy="1371600"/>
+            <a:off x="320040" y="1737360"/>
+            <a:ext cx="6922008" cy="2034540"/>
           </a:xfrm>
           <a:prstGeom prst="roundRect">
             <a:avLst>
-              <a:gd name="adj" fmla="val 10000"/>
+              <a:gd name="adj" fmla="val 6742"/>
             </a:avLst>
           </a:prstGeom>
           <a:solidFill>
@@ -1015,8 +1015,8 @@
         </p:nvSpPr>
         <p:spPr>
           <a:xfrm>
-            <a:off x="548640" y="1993392"/>
-            <a:ext cx="822960" cy="822960"/>
+            <a:off x="594360" y="2251710"/>
+            <a:ext cx="1005840" cy="1005840"/>
           </a:xfrm>
           <a:prstGeom prst="ellipse">
             <a:avLst/>
@@ -1040,8 +1040,8 @@
         </p:nvSpPr>
         <p:spPr>
           <a:xfrm>
-            <a:off x="548640" y="1993392"/>
-            <a:ext cx="822960" cy="822960"/>
+            <a:off x="594360" y="2251710"/>
+            <a:ext cx="1005840" cy="1005840"/>
           </a:xfrm>
           <a:prstGeom prst="rect">
             <a:avLst/>
@@ -1057,7 +1057,7 @@
               <a:buNone/>
             </a:pPr>
             <a:r>
-              <a:rPr lang="en-US" sz="3600" b="1" dirty="0">
+              <a:rPr lang="en-US" sz="4400" b="1" dirty="0">
                 <a:solidFill>
                   <a:srgbClr val="FFFFFF"/>
                 </a:solidFill>
@@ -1067,7 +1067,7 @@
               </a:rPr>
               <a:t>1</a:t>
             </a:r>
-            <a:endParaRPr lang="en-US" sz="3600" dirty="0"/>
+            <a:endParaRPr lang="en-US" sz="4400" dirty="0"/>
           </a:p>
         </p:txBody>
       </p:sp>
@@ -1079,8 +1079,8 @@
         </p:nvSpPr>
         <p:spPr>
           <a:xfrm>
-            <a:off x="1600200" y="1883664"/>
-            <a:ext cx="5577840" cy="731520"/>
+            <a:off x="1828800" y="1920240"/>
+            <a:ext cx="5257800" cy="1051560"/>
           </a:xfrm>
           <a:prstGeom prst="rect">
             <a:avLst/>
@@ -1096,7 +1096,7 @@
               <a:buNone/>
             </a:pPr>
             <a:r>
-              <a:rPr lang="en-US" sz="2000" b="1" dirty="0">
+              <a:rPr lang="en-US" sz="2600" b="1" dirty="0">
                 <a:solidFill>
                   <a:srgbClr val="222222"/>
                 </a:solidFill>
@@ -1106,7 +1106,7 @@
               </a:rPr>
               <a:t>カードを　なげない</a:t>
             </a:r>
-            <a:endParaRPr lang="en-US" sz="2000" dirty="0"/>
+            <a:endParaRPr lang="en-US" sz="2600" dirty="0"/>
           </a:p>
         </p:txBody>
       </p:sp>
@@ -1118,8 +1118,8 @@
         </p:nvSpPr>
         <p:spPr>
           <a:xfrm>
-            <a:off x="1600200" y="2615184"/>
-            <a:ext cx="5486400" cy="347472"/>
+            <a:off x="1828800" y="3017520"/>
+            <a:ext cx="5257800" cy="457200"/>
           </a:xfrm>
           <a:prstGeom prst="rect">
             <a:avLst/>
@@ -1135,7 +1135,7 @@
               <a:buNone/>
             </a:pPr>
             <a:r>
-              <a:rPr lang="en-US" sz="1400" dirty="0">
+              <a:rPr lang="en-US" sz="1600" dirty="0">
                 <a:solidFill>
                   <a:srgbClr val="444444"/>
                 </a:solidFill>
@@ -1145,7 +1145,7 @@
               </a:rPr>
               <a:t>カードは　たいせつに　あつかおう。</a:t>
             </a:r>
-            <a:endParaRPr lang="en-US" sz="1400" dirty="0"/>
+            <a:endParaRPr lang="en-US" sz="1600" dirty="0"/>
           </a:p>
         </p:txBody>
       </p:sp>
@@ -1157,12 +1157,12 @@
         </p:nvSpPr>
         <p:spPr>
           <a:xfrm>
-            <a:off x="320040" y="3218688"/>
-            <a:ext cx="6922008" cy="1371600"/>
+            <a:off x="320040" y="3954780"/>
+            <a:ext cx="6922008" cy="2034540"/>
           </a:xfrm>
           <a:prstGeom prst="roundRect">
             <a:avLst>
-              <a:gd name="adj" fmla="val 10000"/>
+              <a:gd name="adj" fmla="val 6742"/>
             </a:avLst>
           </a:prstGeom>
           <a:solidFill>
@@ -1184,8 +1184,8 @@
         </p:nvSpPr>
         <p:spPr>
           <a:xfrm>
-            <a:off x="548640" y="3493008"/>
-            <a:ext cx="822960" cy="822960"/>
+            <a:off x="594360" y="4469130"/>
+            <a:ext cx="1005840" cy="1005840"/>
           </a:xfrm>
           <a:prstGeom prst="ellipse">
             <a:avLst/>
@@ -1209,8 +1209,8 @@
         </p:nvSpPr>
         <p:spPr>
           <a:xfrm>
-            <a:off x="548640" y="3493008"/>
-            <a:ext cx="822960" cy="822960"/>
+            <a:off x="594360" y="4469130"/>
+            <a:ext cx="1005840" cy="1005840"/>
           </a:xfrm>
           <a:prstGeom prst="rect">
             <a:avLst/>
@@ -1226,7 +1226,7 @@
               <a:buNone/>
             </a:pPr>
             <a:r>
-              <a:rPr lang="en-US" sz="3600" b="1" dirty="0">
+              <a:rPr lang="en-US" sz="4400" b="1" dirty="0">
                 <a:solidFill>
                   <a:srgbClr val="FFFFFF"/>
                 </a:solidFill>
@@ -1236,7 +1236,7 @@
               </a:rPr>
               <a:t>2</a:t>
             </a:r>
-            <a:endParaRPr lang="en-US" sz="3600" dirty="0"/>
+            <a:endParaRPr lang="en-US" sz="4400" dirty="0"/>
           </a:p>
         </p:txBody>
       </p:sp>
@@ -1248,8 +1248,8 @@
         </p:nvSpPr>
         <p:spPr>
           <a:xfrm>
-            <a:off x="1600200" y="3383280"/>
-            <a:ext cx="5577840" cy="731520"/>
+            <a:off x="1828800" y="4137660"/>
+            <a:ext cx="5257800" cy="1051560"/>
           </a:xfrm>
           <a:prstGeom prst="rect">
             <a:avLst/>
@@ -1265,7 +1265,7 @@
               <a:buNone/>
             </a:pPr>
             <a:r>
-              <a:rPr lang="en-US" sz="2000" b="1" dirty="0">
+              <a:rPr lang="en-US" sz="2600" b="1" dirty="0">
                 <a:solidFill>
                   <a:srgbClr val="222222"/>
                 </a:solidFill>
@@ -1273,38 +1273,55 @@
                 <a:ea typeface="Meiryo" pitchFamily="34" charset="-122"/>
                 <a:cs typeface="Meiryo" pitchFamily="34" charset="-120"/>
               </a:rPr>
-              <a:t>かっても、あいてを　からかわない</a:t>
-            </a:r>
-            <a:endParaRPr lang="en-US" sz="2000" dirty="0"/>
-          </a:p>
-        </p:txBody>
-      </p:sp>
-      <p:sp>
-        <p:nvSpPr>
-          <p:cNvPr id="14" name="Text 12"/>
-          <p:cNvSpPr txBox="1"/>
-          <p:nvPr/>
-        </p:nvSpPr>
-        <p:spPr>
-          <a:xfrm>
-            <a:off x="1600200" y="4114800"/>
-            <a:ext cx="5486400" cy="347472"/>
-          </a:xfrm>
-          <a:prstGeom prst="rect">
-            <a:avLst/>
-          </a:prstGeom>
-          <a:noFill/>
-          <a:ln/>
-        </p:spPr>
-        <p:txBody>
-          <a:bodyPr wrap="square" lIns="0" tIns="0" rIns="0" bIns="0" rtlCol="0" anchor="ctr"/>
-          <a:lstStyle/>
+              <a:t>かっても、</a:t>
+            </a:r>
+            <a:endParaRPr lang="en-US" sz="2600" dirty="0"/>
+          </a:p>
           <a:p>
             <a:pPr indent="0" marL="0">
               <a:buNone/>
             </a:pPr>
             <a:r>
-              <a:rPr lang="en-US" sz="1400" dirty="0">
+              <a:rPr lang="en-US" sz="2600" b="1" dirty="0">
+                <a:solidFill>
+                  <a:srgbClr val="222222"/>
+                </a:solidFill>
+                <a:latin typeface="Meiryo" pitchFamily="34" charset="0"/>
+                <a:ea typeface="Meiryo" pitchFamily="34" charset="-122"/>
+                <a:cs typeface="Meiryo" pitchFamily="34" charset="-120"/>
+              </a:rPr>
+              <a:t>あいてを　からかわない</a:t>
+            </a:r>
+            <a:endParaRPr lang="en-US" sz="2600" dirty="0"/>
+          </a:p>
+        </p:txBody>
+      </p:sp>
+      <p:sp>
+        <p:nvSpPr>
+          <p:cNvPr id="14" name="Text 12"/>
+          <p:cNvSpPr txBox="1"/>
+          <p:nvPr/>
+        </p:nvSpPr>
+        <p:spPr>
+          <a:xfrm>
+            <a:off x="1828800" y="5234940"/>
+            <a:ext cx="5257800" cy="457200"/>
+          </a:xfrm>
+          <a:prstGeom prst="rect">
+            <a:avLst/>
+          </a:prstGeom>
+          <a:noFill/>
+          <a:ln/>
+        </p:spPr>
+        <p:txBody>
+          <a:bodyPr wrap="square" lIns="0" tIns="0" rIns="0" bIns="0" rtlCol="0" anchor="ctr"/>
+          <a:lstStyle/>
+          <a:p>
+            <a:pPr indent="0" marL="0">
+              <a:buNone/>
+            </a:pPr>
+            <a:r>
+              <a:rPr lang="en-US" sz="1600" dirty="0">
                 <a:solidFill>
                   <a:srgbClr val="444444"/>
                 </a:solidFill>
@@ -1314,7 +1331,7 @@
               </a:rPr>
               <a:t>あいてがいるから　あそべるよ。</a:t>
             </a:r>
-            <a:endParaRPr lang="en-US" sz="1400" dirty="0"/>
+            <a:endParaRPr lang="en-US" sz="1600" dirty="0"/>
           </a:p>
         </p:txBody>
       </p:sp>
@@ -1326,12 +1343,12 @@
         </p:nvSpPr>
         <p:spPr>
           <a:xfrm>
-            <a:off x="320040" y="4718304"/>
-            <a:ext cx="6922008" cy="1371600"/>
+            <a:off x="320040" y="6172200"/>
+            <a:ext cx="6922008" cy="2034540"/>
           </a:xfrm>
           <a:prstGeom prst="roundRect">
             <a:avLst>
-              <a:gd name="adj" fmla="val 10000"/>
+              <a:gd name="adj" fmla="val 6742"/>
             </a:avLst>
           </a:prstGeom>
           <a:solidFill>
@@ -1353,8 +1370,8 @@
         </p:nvSpPr>
         <p:spPr>
           <a:xfrm>
-            <a:off x="548640" y="4992624"/>
-            <a:ext cx="822960" cy="822960"/>
+            <a:off x="594360" y="6686550"/>
+            <a:ext cx="1005840" cy="1005840"/>
           </a:xfrm>
           <a:prstGeom prst="ellipse">
             <a:avLst/>
@@ -1378,8 +1395,8 @@
         </p:nvSpPr>
         <p:spPr>
           <a:xfrm>
-            <a:off x="548640" y="4992624"/>
-            <a:ext cx="822960" cy="822960"/>
+            <a:off x="594360" y="6686550"/>
+            <a:ext cx="1005840" cy="1005840"/>
           </a:xfrm>
           <a:prstGeom prst="rect">
             <a:avLst/>
@@ -1395,7 +1412,7 @@
               <a:buNone/>
             </a:pPr>
             <a:r>
-              <a:rPr lang="en-US" sz="3600" b="1" dirty="0">
+              <a:rPr lang="en-US" sz="4400" b="1" dirty="0">
                 <a:solidFill>
                   <a:srgbClr val="FFFFFF"/>
                 </a:solidFill>
@@ -1405,7 +1422,7 @@
               </a:rPr>
               <a:t>3</a:t>
             </a:r>
-            <a:endParaRPr lang="en-US" sz="3600" dirty="0"/>
+            <a:endParaRPr lang="en-US" sz="4400" dirty="0"/>
           </a:p>
         </p:txBody>
       </p:sp>
@@ -1417,8 +1434,8 @@
         </p:nvSpPr>
         <p:spPr>
           <a:xfrm>
-            <a:off x="1600200" y="4882896"/>
-            <a:ext cx="5577840" cy="731520"/>
+            <a:off x="1828800" y="6355080"/>
+            <a:ext cx="5257800" cy="1051560"/>
           </a:xfrm>
           <a:prstGeom prst="rect">
             <a:avLst/>
@@ -1434,7 +1451,7 @@
               <a:buNone/>
             </a:pPr>
             <a:r>
-              <a:rPr lang="en-US" sz="2000" b="1" dirty="0">
+              <a:rPr lang="en-US" sz="2600" b="1" dirty="0">
                 <a:solidFill>
                   <a:srgbClr val="222222"/>
                 </a:solidFill>
@@ -1442,38 +1459,55 @@
                 <a:ea typeface="Meiryo" pitchFamily="34" charset="-122"/>
                 <a:cs typeface="Meiryo" pitchFamily="34" charset="-120"/>
               </a:rPr>
-              <a:t>ルールで　まよったら、スタッフに　きく</a:t>
-            </a:r>
-            <a:endParaRPr lang="en-US" sz="2000" dirty="0"/>
-          </a:p>
-        </p:txBody>
-      </p:sp>
-      <p:sp>
-        <p:nvSpPr>
-          <p:cNvPr id="19" name="Text 17"/>
-          <p:cNvSpPr txBox="1"/>
-          <p:nvPr/>
-        </p:nvSpPr>
-        <p:spPr>
-          <a:xfrm>
-            <a:off x="1600200" y="5614416"/>
-            <a:ext cx="5486400" cy="347472"/>
-          </a:xfrm>
-          <a:prstGeom prst="rect">
-            <a:avLst/>
-          </a:prstGeom>
-          <a:noFill/>
-          <a:ln/>
-        </p:spPr>
-        <p:txBody>
-          <a:bodyPr wrap="square" lIns="0" tIns="0" rIns="0" bIns="0" rtlCol="0" anchor="ctr"/>
-          <a:lstStyle/>
+              <a:t>ルールで　まよったら、</a:t>
+            </a:r>
+            <a:endParaRPr lang="en-US" sz="2600" dirty="0"/>
+          </a:p>
           <a:p>
             <a:pPr indent="0" marL="0">
               <a:buNone/>
             </a:pPr>
             <a:r>
-              <a:rPr lang="en-US" sz="1400" dirty="0">
+              <a:rPr lang="en-US" sz="2600" b="1" dirty="0">
+                <a:solidFill>
+                  <a:srgbClr val="222222"/>
+                </a:solidFill>
+                <a:latin typeface="Meiryo" pitchFamily="34" charset="0"/>
+                <a:ea typeface="Meiryo" pitchFamily="34" charset="-122"/>
+                <a:cs typeface="Meiryo" pitchFamily="34" charset="-120"/>
+              </a:rPr>
+              <a:t>スタッフに　きく</a:t>
+            </a:r>
+            <a:endParaRPr lang="en-US" sz="2600" dirty="0"/>
+          </a:p>
+        </p:txBody>
+      </p:sp>
+      <p:sp>
+        <p:nvSpPr>
+          <p:cNvPr id="19" name="Text 17"/>
+          <p:cNvSpPr txBox="1"/>
+          <p:nvPr/>
+        </p:nvSpPr>
+        <p:spPr>
+          <a:xfrm>
+            <a:off x="1828800" y="7452360"/>
+            <a:ext cx="5257800" cy="457200"/>
+          </a:xfrm>
+          <a:prstGeom prst="rect">
+            <a:avLst/>
+          </a:prstGeom>
+          <a:noFill/>
+          <a:ln/>
+        </p:spPr>
+        <p:txBody>
+          <a:bodyPr wrap="square" lIns="0" tIns="0" rIns="0" bIns="0" rtlCol="0" anchor="ctr"/>
+          <a:lstStyle/>
+          <a:p>
+            <a:pPr indent="0" marL="0">
+              <a:buNone/>
+            </a:pPr>
+            <a:r>
+              <a:rPr lang="en-US" sz="1600" dirty="0">
                 <a:solidFill>
                   <a:srgbClr val="444444"/>
                 </a:solidFill>
@@ -1483,7 +1517,7 @@
               </a:rPr>
               <a:t>じぶんたちで　けんかしないで、きいてみよう。</a:t>
             </a:r>
-            <a:endParaRPr lang="en-US" sz="1400" dirty="0"/>
+            <a:endParaRPr lang="en-US" sz="1600" dirty="0"/>
           </a:p>
         </p:txBody>
       </p:sp>
@@ -1495,12 +1529,12 @@
         </p:nvSpPr>
         <p:spPr>
           <a:xfrm>
-            <a:off x="320040" y="6217920"/>
-            <a:ext cx="6922008" cy="1371600"/>
+            <a:off x="320040" y="8389620"/>
+            <a:ext cx="6922008" cy="2034540"/>
           </a:xfrm>
           <a:prstGeom prst="roundRect">
             <a:avLst>
-              <a:gd name="adj" fmla="val 10000"/>
+              <a:gd name="adj" fmla="val 6742"/>
             </a:avLst>
           </a:prstGeom>
           <a:solidFill>
@@ -1522,8 +1556,8 @@
         </p:nvSpPr>
         <p:spPr>
           <a:xfrm>
-            <a:off x="548640" y="6492240"/>
-            <a:ext cx="822960" cy="822960"/>
+            <a:off x="594360" y="8903970"/>
+            <a:ext cx="1005840" cy="1005840"/>
           </a:xfrm>
           <a:prstGeom prst="ellipse">
             <a:avLst/>
@@ -1547,8 +1581,8 @@
         </p:nvSpPr>
         <p:spPr>
           <a:xfrm>
-            <a:off x="548640" y="6492240"/>
-            <a:ext cx="822960" cy="822960"/>
+            <a:off x="594360" y="8903970"/>
+            <a:ext cx="1005840" cy="1005840"/>
           </a:xfrm>
           <a:prstGeom prst="rect">
             <a:avLst/>
@@ -1564,7 +1598,7 @@
               <a:buNone/>
             </a:pPr>
             <a:r>
-              <a:rPr lang="en-US" sz="3600" b="1" dirty="0">
+              <a:rPr lang="en-US" sz="4400" b="1" dirty="0">
                 <a:solidFill>
                   <a:srgbClr val="FFFFFF"/>
                 </a:solidFill>
@@ -1574,7 +1608,7 @@
               </a:rPr>
               <a:t>4</a:t>
             </a:r>
-            <a:endParaRPr lang="en-US" sz="3600" dirty="0"/>
+            <a:endParaRPr lang="en-US" sz="4400" dirty="0"/>
           </a:p>
         </p:txBody>
       </p:sp>
@@ -1586,8 +1620,8 @@
         </p:nvSpPr>
         <p:spPr>
           <a:xfrm>
-            <a:off x="1600200" y="6382512"/>
-            <a:ext cx="5577840" cy="731520"/>
+            <a:off x="1828800" y="8572500"/>
+            <a:ext cx="5257800" cy="1051560"/>
           </a:xfrm>
           <a:prstGeom prst="rect">
             <a:avLst/>
@@ -1603,7 +1637,7 @@
               <a:buNone/>
             </a:pPr>
             <a:r>
-              <a:rPr lang="en-US" sz="2000" b="1" dirty="0">
+              <a:rPr lang="en-US" sz="2600" b="1" dirty="0">
                 <a:solidFill>
                   <a:srgbClr val="222222"/>
                 </a:solidFill>
@@ -1611,38 +1645,55 @@
                 <a:ea typeface="Meiryo" pitchFamily="34" charset="-122"/>
                 <a:cs typeface="Meiryo" pitchFamily="34" charset="-120"/>
               </a:rPr>
-              <a:t>くやしく　なったら、おやすみ　してOK</a:t>
-            </a:r>
-            <a:endParaRPr lang="en-US" sz="2000" dirty="0"/>
-          </a:p>
-        </p:txBody>
-      </p:sp>
-      <p:sp>
-        <p:nvSpPr>
-          <p:cNvPr id="24" name="Text 22"/>
-          <p:cNvSpPr txBox="1"/>
-          <p:nvPr/>
-        </p:nvSpPr>
-        <p:spPr>
-          <a:xfrm>
-            <a:off x="1600200" y="7114032"/>
-            <a:ext cx="5486400" cy="347472"/>
-          </a:xfrm>
-          <a:prstGeom prst="rect">
-            <a:avLst/>
-          </a:prstGeom>
-          <a:noFill/>
-          <a:ln/>
-        </p:spPr>
-        <p:txBody>
-          <a:bodyPr wrap="square" lIns="0" tIns="0" rIns="0" bIns="0" rtlCol="0" anchor="ctr"/>
-          <a:lstStyle/>
+              <a:t>くやしく　なったら、</a:t>
+            </a:r>
+            <a:endParaRPr lang="en-US" sz="2600" dirty="0"/>
+          </a:p>
           <a:p>
             <a:pPr indent="0" marL="0">
               <a:buNone/>
             </a:pPr>
             <a:r>
-              <a:rPr lang="en-US" sz="1400" dirty="0">
+              <a:rPr lang="en-US" sz="2600" b="1" dirty="0">
+                <a:solidFill>
+                  <a:srgbClr val="222222"/>
+                </a:solidFill>
+                <a:latin typeface="Meiryo" pitchFamily="34" charset="0"/>
+                <a:ea typeface="Meiryo" pitchFamily="34" charset="-122"/>
+                <a:cs typeface="Meiryo" pitchFamily="34" charset="-120"/>
+              </a:rPr>
+              <a:t>おやすみ　してOK</a:t>
+            </a:r>
+            <a:endParaRPr lang="en-US" sz="2600" dirty="0"/>
+          </a:p>
+        </p:txBody>
+      </p:sp>
+      <p:sp>
+        <p:nvSpPr>
+          <p:cNvPr id="24" name="Text 22"/>
+          <p:cNvSpPr txBox="1"/>
+          <p:nvPr/>
+        </p:nvSpPr>
+        <p:spPr>
+          <a:xfrm>
+            <a:off x="1828800" y="9669780"/>
+            <a:ext cx="5257800" cy="457200"/>
+          </a:xfrm>
+          <a:prstGeom prst="rect">
+            <a:avLst/>
+          </a:prstGeom>
+          <a:noFill/>
+          <a:ln/>
+        </p:spPr>
+        <p:txBody>
+          <a:bodyPr wrap="square" lIns="0" tIns="0" rIns="0" bIns="0" rtlCol="0" anchor="ctr"/>
+          <a:lstStyle/>
+          <a:p>
+            <a:pPr indent="0" marL="0">
+              <a:buNone/>
+            </a:pPr>
+            <a:r>
+              <a:rPr lang="en-US" sz="1600" dirty="0">
                 <a:solidFill>
                   <a:srgbClr val="444444"/>
                 </a:solidFill>
@@ -1650,302 +1701,11 @@
                 <a:ea typeface="Meiryo" pitchFamily="34" charset="-122"/>
                 <a:cs typeface="Meiryo" pitchFamily="34" charset="-120"/>
               </a:rPr>
-              <a:t>おちついたら、また　まぜてね。</a:t>
-            </a:r>
-            <a:endParaRPr lang="en-US" sz="1400" dirty="0"/>
-          </a:p>
-        </p:txBody>
-      </p:sp>
-      <p:sp>
-        <p:nvSpPr>
-          <p:cNvPr id="25" name="Shape 23"/>
-          <p:cNvSpPr/>
-          <p:nvPr/>
-        </p:nvSpPr>
-        <p:spPr>
-          <a:xfrm>
-            <a:off x="320040" y="7735824"/>
-            <a:ext cx="6922008" cy="2688336"/>
-          </a:xfrm>
-          <a:prstGeom prst="roundRect">
-            <a:avLst>
-              <a:gd name="adj" fmla="val 5102"/>
-            </a:avLst>
-          </a:prstGeom>
-          <a:solidFill>
-            <a:srgbClr val="FFFFFF"/>
-          </a:solidFill>
-          <a:ln w="25400">
-            <a:solidFill>
-              <a:srgbClr val="7B8794"/>
-            </a:solidFill>
-            <a:prstDash val="dash"/>
-          </a:ln>
-        </p:spPr>
-      </p:sp>
-      <p:sp>
-        <p:nvSpPr>
-          <p:cNvPr id="26" name="Text 24"/>
-          <p:cNvSpPr txBox="1"/>
-          <p:nvPr/>
-        </p:nvSpPr>
-        <p:spPr>
-          <a:xfrm>
-            <a:off x="502920" y="7827264"/>
-            <a:ext cx="6556248" cy="457200"/>
-          </a:xfrm>
-          <a:prstGeom prst="rect">
-            <a:avLst/>
-          </a:prstGeom>
-          <a:noFill/>
-          <a:ln/>
-        </p:spPr>
-        <p:txBody>
-          <a:bodyPr wrap="square" lIns="0" tIns="0" rIns="0" bIns="0" rtlCol="0" anchor="ctr"/>
-          <a:lstStyle/>
-          <a:p>
-            <a:pPr algn="ctr" indent="0" marL="0">
-              <a:buNone/>
-            </a:pPr>
-            <a:r>
-              <a:rPr lang="en-US" sz="1700" b="1" dirty="0">
-                <a:solidFill>
-                  <a:srgbClr val="1F3A5F"/>
-                </a:solidFill>
-                <a:latin typeface="Meiryo" pitchFamily="34" charset="0"/>
-                <a:ea typeface="Meiryo" pitchFamily="34" charset="-122"/>
-                <a:cs typeface="Meiryo" pitchFamily="34" charset="-120"/>
-              </a:rPr>
-              <a:t>みんなで　はなしあって、やくそくは　かえることが　できます！</a:t>
-            </a:r>
-            <a:endParaRPr lang="en-US" sz="1700" dirty="0"/>
-          </a:p>
-        </p:txBody>
-      </p:sp>
-      <p:sp>
-        <p:nvSpPr>
-          <p:cNvPr id="27" name="Text 25"/>
-          <p:cNvSpPr txBox="1"/>
-          <p:nvPr/>
-        </p:nvSpPr>
-        <p:spPr>
-          <a:xfrm>
-            <a:off x="502920" y="8284464"/>
-            <a:ext cx="6556248" cy="274320"/>
-          </a:xfrm>
-          <a:prstGeom prst="rect">
-            <a:avLst/>
-          </a:prstGeom>
-          <a:noFill/>
-          <a:ln/>
-        </p:spPr>
-        <p:txBody>
-          <a:bodyPr wrap="square" lIns="0" tIns="0" rIns="0" bIns="0" rtlCol="0" anchor="ctr"/>
-          <a:lstStyle/>
-          <a:p>
-            <a:pPr algn="ctr" indent="0" marL="0">
-              <a:buNone/>
-            </a:pPr>
-            <a:r>
-              <a:rPr lang="en-US" sz="1100" dirty="0">
-                <a:solidFill>
-                  <a:srgbClr val="555555"/>
-                </a:solidFill>
-                <a:latin typeface="Meiryo" pitchFamily="34" charset="0"/>
-                <a:ea typeface="Meiryo" pitchFamily="34" charset="-122"/>
-                <a:cs typeface="Meiryo" pitchFamily="34" charset="-120"/>
-              </a:rPr>
-              <a:t>あたらしい　やくそくを　みんなで　きめたら、ここに　かこう。</a:t>
-            </a:r>
-            <a:endParaRPr lang="en-US" sz="1100" dirty="0"/>
-          </a:p>
-        </p:txBody>
-      </p:sp>
-      <p:sp>
-        <p:nvSpPr>
-          <p:cNvPr id="28" name="Text 26"/>
-          <p:cNvSpPr txBox="1"/>
-          <p:nvPr/>
-        </p:nvSpPr>
-        <p:spPr>
-          <a:xfrm>
-            <a:off x="594360" y="8695944"/>
-            <a:ext cx="365760" cy="365760"/>
-          </a:xfrm>
-          <a:prstGeom prst="rect">
-            <a:avLst/>
-          </a:prstGeom>
-          <a:noFill/>
-          <a:ln/>
-        </p:spPr>
-        <p:txBody>
-          <a:bodyPr wrap="square" lIns="0" tIns="0" rIns="0" bIns="0" rtlCol="0" anchor="ctr"/>
-          <a:lstStyle/>
-          <a:p>
-            <a:pPr indent="0" marL="0">
-              <a:buNone/>
-            </a:pPr>
-            <a:r>
-              <a:rPr lang="en-US" sz="1600" b="1" dirty="0">
-                <a:solidFill>
-                  <a:srgbClr val="7B8794"/>
-                </a:solidFill>
-                <a:latin typeface="Meiryo" pitchFamily="34" charset="0"/>
-                <a:ea typeface="Meiryo" pitchFamily="34" charset="-122"/>
-                <a:cs typeface="Meiryo" pitchFamily="34" charset="-120"/>
-              </a:rPr>
-              <a:t>5.</a:t>
+              <a:t>おちついたら、また　あそぼうね。</a:t>
             </a:r>
             <a:endParaRPr lang="en-US" sz="1600" dirty="0"/>
           </a:p>
         </p:txBody>
-      </p:sp>
-      <p:sp>
-        <p:nvSpPr>
-          <p:cNvPr id="29" name="Shape 27"/>
-          <p:cNvSpPr/>
-          <p:nvPr/>
-        </p:nvSpPr>
-        <p:spPr>
-          <a:xfrm>
-            <a:off x="960120" y="9061704"/>
-            <a:ext cx="6080760" cy="0"/>
-          </a:xfrm>
-          <a:prstGeom prst="line">
-            <a:avLst/>
-          </a:prstGeom>
-          <a:noFill/>
-          <a:ln w="12700">
-            <a:solidFill>
-              <a:srgbClr val="7B8794"/>
-            </a:solidFill>
-            <a:prstDash val="solid"/>
-          </a:ln>
-        </p:spPr>
-      </p:sp>
-      <p:sp>
-        <p:nvSpPr>
-          <p:cNvPr id="30" name="Text 28"/>
-          <p:cNvSpPr txBox="1"/>
-          <p:nvPr/>
-        </p:nvSpPr>
-        <p:spPr>
-          <a:xfrm>
-            <a:off x="594360" y="9116568"/>
-            <a:ext cx="365760" cy="365760"/>
-          </a:xfrm>
-          <a:prstGeom prst="rect">
-            <a:avLst/>
-          </a:prstGeom>
-          <a:noFill/>
-          <a:ln/>
-        </p:spPr>
-        <p:txBody>
-          <a:bodyPr wrap="square" lIns="0" tIns="0" rIns="0" bIns="0" rtlCol="0" anchor="ctr"/>
-          <a:lstStyle/>
-          <a:p>
-            <a:pPr indent="0" marL="0">
-              <a:buNone/>
-            </a:pPr>
-            <a:r>
-              <a:rPr lang="en-US" sz="1600" b="1" dirty="0">
-                <a:solidFill>
-                  <a:srgbClr val="7B8794"/>
-                </a:solidFill>
-                <a:latin typeface="Meiryo" pitchFamily="34" charset="0"/>
-                <a:ea typeface="Meiryo" pitchFamily="34" charset="-122"/>
-                <a:cs typeface="Meiryo" pitchFamily="34" charset="-120"/>
-              </a:rPr>
-              <a:t>6.</a:t>
-            </a:r>
-            <a:endParaRPr lang="en-US" sz="1600" dirty="0"/>
-          </a:p>
-        </p:txBody>
-      </p:sp>
-      <p:sp>
-        <p:nvSpPr>
-          <p:cNvPr id="31" name="Shape 29"/>
-          <p:cNvSpPr/>
-          <p:nvPr/>
-        </p:nvSpPr>
-        <p:spPr>
-          <a:xfrm>
-            <a:off x="960120" y="9482328"/>
-            <a:ext cx="6080760" cy="0"/>
-          </a:xfrm>
-          <a:prstGeom prst="line">
-            <a:avLst/>
-          </a:prstGeom>
-          <a:noFill/>
-          <a:ln w="12700">
-            <a:solidFill>
-              <a:srgbClr val="7B8794"/>
-            </a:solidFill>
-            <a:prstDash val="solid"/>
-          </a:ln>
-        </p:spPr>
-      </p:sp>
-      <p:sp>
-        <p:nvSpPr>
-          <p:cNvPr id="32" name="Text 30"/>
-          <p:cNvSpPr txBox="1"/>
-          <p:nvPr/>
-        </p:nvSpPr>
-        <p:spPr>
-          <a:xfrm>
-            <a:off x="594360" y="9537192"/>
-            <a:ext cx="365760" cy="365760"/>
-          </a:xfrm>
-          <a:prstGeom prst="rect">
-            <a:avLst/>
-          </a:prstGeom>
-          <a:noFill/>
-          <a:ln/>
-        </p:spPr>
-        <p:txBody>
-          <a:bodyPr wrap="square" lIns="0" tIns="0" rIns="0" bIns="0" rtlCol="0" anchor="ctr"/>
-          <a:lstStyle/>
-          <a:p>
-            <a:pPr indent="0" marL="0">
-              <a:buNone/>
-            </a:pPr>
-            <a:r>
-              <a:rPr lang="en-US" sz="1600" b="1" dirty="0">
-                <a:solidFill>
-                  <a:srgbClr val="7B8794"/>
-                </a:solidFill>
-                <a:latin typeface="Meiryo" pitchFamily="34" charset="0"/>
-                <a:ea typeface="Meiryo" pitchFamily="34" charset="-122"/>
-                <a:cs typeface="Meiryo" pitchFamily="34" charset="-120"/>
-              </a:rPr>
-              <a:t>7.</a:t>
-            </a:r>
-            <a:endParaRPr lang="en-US" sz="1600" dirty="0"/>
-          </a:p>
-        </p:txBody>
-      </p:sp>
-      <p:sp>
-        <p:nvSpPr>
-          <p:cNvPr id="33" name="Shape 31"/>
-          <p:cNvSpPr/>
-          <p:nvPr/>
-        </p:nvSpPr>
-        <p:spPr>
-          <a:xfrm>
-            <a:off x="960120" y="9902952"/>
-            <a:ext cx="6080760" cy="0"/>
-          </a:xfrm>
-          <a:prstGeom prst="line">
-            <a:avLst/>
-          </a:prstGeom>
-          <a:noFill/>
-          <a:ln w="12700">
-            <a:solidFill>
-              <a:srgbClr val="7B8794"/>
-            </a:solidFill>
-            <a:prstDash val="solid"/>
-          </a:ln>
-        </p:spPr>
       </p:sp>
     </p:spTree>
   </p:cSld>
